--- a/docs/CA6001_Human_Context_Reviewed.pptx
+++ b/docs/CA6001_Human_Context_Reviewed.pptx
@@ -308,7 +308,55 @@
           <a:lstStyle/>
           <a:p>
             <a:r>
-              <a:t>Our project predicts whether a human chess game ends in a Black win, draw, or White win as moves become available. The central question is not whether Stockfish can evaluate chess positions—it can—but whether its engine-oriented WDL estimate is sufficient for actual human games. Human outcomes can also depend on who is playing, their rating difference, and the time control. We therefore compare direct Stockfish WDL with two matched histogram gradient boosting models: one sees the position only, and the other also sees pre-match human context. The presentation follows the executed notebook and uses only its exported figures and held-out results.</a:t>
+              <a:rPr lang="en-US" altLang="zh-CN" dirty="0"/>
+              <a:t>Good afternoon. We are Group 1 from CA6001, and our project focuses on human-context chess outcome prediction.</a:t>
+            </a:r>
+          </a:p>
+          <a:p>
+            <a:r>
+              <a:rPr lang="en-US" altLang="zh-CN" dirty="0"/>
+              <a:t>Modern chess engines such as Stockfish can evaluate the objective strength of a board position very effectively. However, the outcome of a game between human players may also depend on factors beyond the board, such as player ratings and time control.</a:t>
+            </a:r>
+          </a:p>
+          <a:p>
+            <a:r>
+              <a:rPr lang="en-US" altLang="zh-CN" dirty="0"/>
+              <a:t>We selected the Chess Game Dataset from </a:t>
+            </a:r>
+            <a:r>
+              <a:rPr lang="en-US" altLang="zh-CN" dirty="0" err="1"/>
+              <a:t>Lichess</a:t>
+            </a:r>
+            <a:r>
+              <a:rPr lang="en-US" altLang="zh-CN" dirty="0"/>
+              <a:t>, which contains approximately 20,000 games played by human players. It includes pre-match information, complete move sequences, and final results.</a:t>
+            </a:r>
+          </a:p>
+          <a:p>
+            <a:r>
+              <a:rPr lang="en-US" altLang="zh-CN" dirty="0"/>
+              <a:t>Using this dataset, we developed a machine-learning classifier based on </a:t>
+            </a:r>
+            <a:r>
+              <a:rPr lang="en-US" altLang="zh-CN" sz="1200" kern="1200" dirty="0" err="1">
+                <a:solidFill>
+                  <a:schemeClr val="tx1"/>
+                </a:solidFill>
+                <a:latin typeface="+mn-lt"/>
+                <a:ea typeface="+mn-ea"/>
+                <a:cs typeface="+mn-cs"/>
+              </a:rPr>
+              <a:t>HistGradientBoostingClassifier</a:t>
+            </a:r>
+            <a:r>
+              <a:rPr lang="en-US" altLang="zh-CN" dirty="0"/>
+              <a:t>. It combines pre-match context, Stockfish evaluations of positions throughout the game, and a small set of interpretable manually engineered features to predict whether Black wins, the game is drawn, or White wins.</a:t>
+            </a:r>
+          </a:p>
+          <a:p>
+            <a:r>
+              <a:rPr lang="en-US" altLang="zh-CN" dirty="0"/>
+              <a:t>Our results show that incorporating human context improves outcome prediction beyond position-based evaluation alone, with particularly clear gains during the early stages of a game.</a:t>
             </a:r>
           </a:p>
         </p:txBody>
@@ -658,6 +706,7 @@
           <a:lstStyle/>
           <a:p>
             <a:r>
+              <a:rPr dirty="0"/>
               <a:t>The storyline is a controlled comparison. Direct Stockfish WDL is the engine reference and is not fitted to this dataset. Position-only HGB then learns how the same engine evidence and simple board summaries map to recorded human outcomes. The main Human-context HGB uses exactly the same classifier settings and position representation, then adds ratings, rated status, and time-control variables. Because the two learned models differ only in their information set, their performance gap directly answers our predictive research question within this experiment. It is an association and ablation result, not a causal claim about rating or time control.</a:t>
             </a:r>
           </a:p>
@@ -728,6 +777,7 @@
           <a:lstStyle/>
           <a:p>
             <a:r>
+              <a:rPr dirty="0"/>
               <a:t>The source contains 20,058 rows. Removing 945 repeated game identifiers leaves 19,113 unique games: 8,680 Black wins, 888 draws, and 9,545 White wins. Draws are only 4.6 percent, so accuracy alone is not sufficient; macro-F1 is also reported. The split is stratified by outcome, with 70 percent for training and 15 percent each for validation and test, using seed 6001. Splitting happens before position extraction, so every snapshot from a game remains in the same partition. The figure also shows overlapping rating distributions, the relationship between rating difference and outcome, and the dominant time controls.</a:t>
             </a:r>
           </a:p>
@@ -798,6 +848,7 @@
           <a:lstStyle/>
           <a:p>
             <a:r>
+              <a:rPr dirty="0"/>
               <a:t>One ply is one move by one player, or half of a full move. Training and validation sample positions after ply 4 and then plies 8, 16, 24, and so on to 160. For example, ply 24 is the position after 12 complete moves. A short game contributes only checkpoints it reaches. This absolute schedule limits computation and never requires knowing the future. Percentage progress would be current ply divided by the final ply count, but the denominator is unknown during live prediction. Using it as a feature would leak future game length. We therefore use current ply as the input and calculate percentages only after test games finish, solely to align reporting positions across games.</a:t>
             </a:r>
           </a:p>
